--- a/assets/ppts/M1.7_DNS_System.pptx
+++ b/assets/ppts/M1.7_DNS_System.pptx
@@ -9,6 +9,7 @@
     <p:sldId id="257" r:id="rId8"/>
     <p:sldId id="258" r:id="rId9"/>
     <p:sldId id="259" r:id="rId10"/>
+    <p:sldId id="260" r:id="rId11"/>
   </p:sldIdLst>
   <p:sldSz cx="12191695" cy="6858000" type="screen4x3"/>
   <p:notesSz cx="6858000" cy="9144000"/>
@@ -3142,8 +3143,8 @@
         </p:nvSpPr>
         <p:spPr>
           <a:xfrm>
-            <a:off x="822960" y="1188720"/>
-            <a:ext cx="164592" cy="4480560"/>
+            <a:off x="0" y="0"/>
+            <a:ext cx="12191695" cy="137160"/>
           </a:xfrm>
           <a:prstGeom prst="rect">
             <a:avLst/>
@@ -3179,14 +3180,57 @@
       </p:sp>
       <p:sp>
         <p:nvSpPr>
-          <p:cNvPr id="4" name="TextBox 3"/>
+          <p:cNvPr id="4" name="Rectangle 3"/>
+          <p:cNvSpPr/>
+          <p:nvPr/>
+        </p:nvSpPr>
+        <p:spPr>
+          <a:xfrm>
+            <a:off x="822960" y="1097280"/>
+            <a:ext cx="164592" cy="4663440"/>
+          </a:xfrm>
+          <a:prstGeom prst="rect">
+            <a:avLst/>
+          </a:prstGeom>
+          <a:solidFill>
+            <a:srgbClr val="D97706"/>
+          </a:solidFill>
+          <a:ln>
+            <a:noFill/>
+          </a:ln>
+        </p:spPr>
+        <p:style>
+          <a:lnRef idx="1">
+            <a:schemeClr val="accent1"/>
+          </a:lnRef>
+          <a:fillRef idx="3">
+            <a:schemeClr val="accent1"/>
+          </a:fillRef>
+          <a:effectRef idx="2">
+            <a:schemeClr val="accent1"/>
+          </a:effectRef>
+          <a:fontRef idx="minor">
+            <a:schemeClr val="lt1"/>
+          </a:fontRef>
+        </p:style>
+        <p:txBody>
+          <a:bodyPr rtlCol="0" anchor="ctr"/>
+          <a:lstStyle/>
+          <a:p>
+            <a:pPr algn="ctr"/>
+          </a:p>
+        </p:txBody>
+      </p:sp>
+      <p:sp>
+        <p:nvSpPr>
+          <p:cNvPr id="5" name="TextBox 4"/>
           <p:cNvSpPr txBox="1"/>
           <p:nvPr/>
         </p:nvSpPr>
         <p:spPr>
           <a:xfrm>
-            <a:off x="1280160" y="1097280"/>
-            <a:ext cx="10058400" cy="4663440"/>
+            <a:off x="1234440" y="1005840"/>
+            <a:ext cx="10241280" cy="4846320"/>
           </a:xfrm>
           <a:prstGeom prst="rect">
             <a:avLst/>
@@ -3201,70 +3245,165 @@
           <a:p>
             <a:pPr>
               <a:spcAft>
+                <a:spcPts val="1000"/>
+              </a:spcAft>
+              <a:defRPr b="1" sz="1300">
+                <a:solidFill>
+                  <a:srgbClr val="D97706"/>
+                </a:solidFill>
+              </a:defRPr>
+            </a:pPr>
+            <a:r>
+              <a:t>PCCST501 Computer Networks | KTU 2024 Scheme • MODULE 1 • M1.7</a:t>
+            </a:r>
+          </a:p>
+          <a:p>
+            <a:pPr>
+              <a:spcAft>
                 <a:spcPts val="1200"/>
               </a:spcAft>
-              <a:defRPr b="1" sz="1300">
+              <a:defRPr b="1" sz="3000">
+                <a:solidFill>
+                  <a:srgbClr val="F8FAFC"/>
+                </a:solidFill>
+              </a:defRPr>
+            </a:pPr>
+            <a:r>
+              <a:t>Domain Name System (DNS) Architecture</a:t>
+            </a:r>
+          </a:p>
+          <a:p>
+            <a:pPr>
+              <a:spcAft>
+                <a:spcPts val="2400"/>
+              </a:spcAft>
+              <a:defRPr sz="1600">
+                <a:solidFill>
+                  <a:srgbClr val="94A3B8"/>
+                </a:solidFill>
+              </a:defRPr>
+            </a:pPr>
+            <a:r>
+              <a:t>Hierarchical Distributed Database, Root/TLD/Authoritative Servers, Iterative vs Recursive Queries, DNS Caching &amp; TTL, Resource Records (RR)</a:t>
+            </a:r>
+          </a:p>
+          <a:p>
+            <a:pPr>
+              <a:spcAft>
+                <a:spcPts val="300"/>
+              </a:spcAft>
+              <a:defRPr b="1" sz="1350">
+                <a:solidFill>
+                  <a:srgbClr val="E2E8F0"/>
+                </a:solidFill>
+              </a:defRPr>
+            </a:pPr>
+            <a:r>
+              <a:t>Prepared by: Prof. Anju Markose | Assistant Professor, Dept. of CSE | VJCET</a:t>
+            </a:r>
+          </a:p>
+          <a:p>
+            <a:pPr>
+              <a:defRPr sz="1150">
+                <a:solidFill>
+                  <a:srgbClr val="94A3B8"/>
+                </a:solidFill>
+              </a:defRPr>
+            </a:pPr>
+            <a:r>
+              <a:t>Viswajyothi College of Engineering and Technology (VJCET), Vazhakulam • KTU S5 CSE</a:t>
+            </a:r>
+          </a:p>
+        </p:txBody>
+      </p:sp>
+      <p:sp>
+        <p:nvSpPr>
+          <p:cNvPr id="6" name="Rounded Rectangle 5"/>
+          <p:cNvSpPr/>
+          <p:nvPr/>
+        </p:nvSpPr>
+        <p:spPr>
+          <a:xfrm>
+            <a:off x="8412480" y="5120640"/>
+            <a:ext cx="3017520" cy="822960"/>
+          </a:xfrm>
+          <a:prstGeom prst="roundRect">
+            <a:avLst/>
+          </a:prstGeom>
+          <a:solidFill>
+            <a:srgbClr val="1E293B"/>
+          </a:solidFill>
+          <a:ln w="12700">
+            <a:solidFill>
+              <a:srgbClr val="0E7490"/>
+            </a:solidFill>
+          </a:ln>
+        </p:spPr>
+        <p:style>
+          <a:lnRef idx="1">
+            <a:schemeClr val="accent1"/>
+          </a:lnRef>
+          <a:fillRef idx="3">
+            <a:schemeClr val="accent1"/>
+          </a:fillRef>
+          <a:effectRef idx="2">
+            <a:schemeClr val="accent1"/>
+          </a:effectRef>
+          <a:fontRef idx="minor">
+            <a:schemeClr val="lt1"/>
+          </a:fontRef>
+        </p:style>
+        <p:txBody>
+          <a:bodyPr rtlCol="0" anchor="ctr"/>
+          <a:lstStyle/>
+          <a:p>
+            <a:pPr algn="ctr"/>
+          </a:p>
+        </p:txBody>
+      </p:sp>
+      <p:sp>
+        <p:nvSpPr>
+          <p:cNvPr id="7" name="TextBox 6"/>
+          <p:cNvSpPr txBox="1"/>
+          <p:nvPr/>
+        </p:nvSpPr>
+        <p:spPr>
+          <a:xfrm>
+            <a:off x="8503920" y="5166360"/>
+            <a:ext cx="2834640" cy="731520"/>
+          </a:xfrm>
+          <a:prstGeom prst="rect">
+            <a:avLst/>
+          </a:prstGeom>
+          <a:noFill/>
+        </p:spPr>
+        <p:txBody>
+          <a:bodyPr wrap="none">
+            <a:spAutoFit/>
+          </a:bodyPr>
+          <a:lstStyle/>
+          <a:p>
+            <a:pPr>
+              <a:defRPr b="1" sz="1050">
                 <a:solidFill>
                   <a:srgbClr val="D97706"/>
                 </a:solidFill>
               </a:defRPr>
             </a:pPr>
             <a:r>
-              <a:t>PCCST501 Computer Networks | KTU 2024 Scheme • MODULE 1 • M1.7</a:t>
-            </a:r>
-          </a:p>
-          <a:p>
-            <a:pPr>
-              <a:spcAft>
-                <a:spcPts val="1400"/>
-              </a:spcAft>
-              <a:defRPr b="1" sz="3200">
+              <a:t>KTU B.Tech Curriculum</a:t>
+            </a:r>
+          </a:p>
+          <a:p>
+            <a:pPr>
+              <a:defRPr sz="950">
                 <a:solidFill>
                   <a:srgbClr val="F8FAFC"/>
                 </a:solidFill>
               </a:defRPr>
             </a:pPr>
             <a:r>
-              <a:t>Domain Name System (DNS)</a:t>
-            </a:r>
-          </a:p>
-          <a:p>
-            <a:pPr>
-              <a:spcAft>
-                <a:spcPts val="2800"/>
-              </a:spcAft>
-              <a:defRPr sz="1700">
-                <a:solidFill>
-                  <a:srgbClr val="94A3B8"/>
-                </a:solidFill>
-              </a:defRPr>
-            </a:pPr>
-            <a:r>
-              <a:t>Hierarchical Namespace, Root &amp; TLD Servers, Recursive vs Iterative Resolution, Resource Records &amp; Caching</a:t>
-            </a:r>
-          </a:p>
-          <a:p>
-            <a:pPr>
-              <a:defRPr b="1" sz="1300">
-                <a:solidFill>
-                  <a:srgbClr val="E2E8F0"/>
-                </a:solidFill>
-              </a:defRPr>
-            </a:pPr>
-            <a:r>
-              <a:t>Prepared by: Prof. Anju Markose | Assistant Professor, Dept. of CSE | VJCET</a:t>
-            </a:r>
-          </a:p>
-          <a:p>
-            <a:pPr>
-              <a:defRPr sz="1100">
-                <a:solidFill>
-                  <a:srgbClr val="94A3B8"/>
-                </a:solidFill>
-              </a:defRPr>
-            </a:pPr>
-            <a:r>
-              <a:t>Viswajyothi College of Engineering and Technology (VJCET), Vazhakulam</a:t>
+              <a:t>Official Classroom Slide Deck</a:t>
             </a:r>
           </a:p>
         </p:txBody>
@@ -3396,14 +3535,14 @@
           <a:lstStyle/>
           <a:p>
             <a:pPr>
-              <a:defRPr b="1" sz="2300">
+              <a:defRPr b="1" sz="2200">
                 <a:solidFill>
                   <a:srgbClr val="F8FAFC"/>
                 </a:solidFill>
               </a:defRPr>
             </a:pPr>
             <a:r>
-              <a:t>1.7.1 DNS Hierarchy &amp; Architecture</a:t>
+              <a:t>1.7.1 DNS: Distributed Hierarchical Database</a:t>
             </a:r>
           </a:p>
         </p:txBody>
@@ -3438,7 +3577,7 @@
               </a:defRPr>
             </a:pPr>
             <a:r>
-              <a:t>M1.7 DNS HIERARCHY</a:t>
+              <a:t>M1.7 DNS ARCHITECTURE</a:t>
             </a:r>
           </a:p>
         </p:txBody>
@@ -3451,7 +3590,7 @@
         </p:nvSpPr>
         <p:spPr>
           <a:xfrm>
-            <a:off x="731520" y="1280160"/>
+            <a:off x="731520" y="1234440"/>
             <a:ext cx="6858000" cy="4937760"/>
           </a:xfrm>
           <a:prstGeom prst="rect">
@@ -3469,29 +3608,29 @@
               <a:spcAft>
                 <a:spcPts val="200"/>
               </a:spcAft>
-              <a:defRPr b="1" sz="1500">
+              <a:defRPr b="1" sz="1450">
                 <a:solidFill>
                   <a:srgbClr val="0F1E4A"/>
                 </a:solidFill>
               </a:defRPr>
             </a:pPr>
             <a:r>
-              <a:t>• DNS Role</a:t>
+              <a:t>• DNS Core Function</a:t>
             </a:r>
           </a:p>
           <a:p>
             <a:pPr>
               <a:spcAft>
-                <a:spcPts val="800"/>
+                <a:spcPts val="700"/>
               </a:spcAft>
-              <a:defRPr sz="1300">
-                <a:solidFill>
-                  <a:srgbClr val="1E293B"/>
-                </a:solidFill>
-              </a:defRPr>
-            </a:pPr>
-            <a:r>
-              <a:t>   Distributed, hierarchical database that translates human-friendly hostnames (e.g. `www.vjcet.ac.in`) into 32-bit IPv4 or 128-bit IPv6 machine addresses. Operates over UDP/TCP Port 53.</a:t>
+              <a:defRPr sz="1250">
+                <a:solidFill>
+                  <a:srgbClr val="0F172A"/>
+                </a:solidFill>
+              </a:defRPr>
+            </a:pPr>
+            <a:r>
+              <a:t>   Application-layer service translating human-readable hostnames (e.g., `www.vjcet.ac.in`) into 32-bit IPv4 / 128-bit IPv6 machine addresses.</a:t>
             </a:r>
           </a:p>
           <a:p>
@@ -3499,29 +3638,29 @@
               <a:spcAft>
                 <a:spcPts val="200"/>
               </a:spcAft>
-              <a:defRPr b="1" sz="1500">
+              <a:defRPr b="1" sz="1450">
                 <a:solidFill>
                   <a:srgbClr val="0F1E4A"/>
                 </a:solidFill>
               </a:defRPr>
             </a:pPr>
             <a:r>
-              <a:t>• Root DNS Servers</a:t>
+              <a:t>• Why Distributed &amp; Hierarchical?</a:t>
             </a:r>
           </a:p>
           <a:p>
             <a:pPr>
               <a:spcAft>
-                <a:spcPts val="800"/>
+                <a:spcPts val="700"/>
               </a:spcAft>
-              <a:defRPr sz="1300">
-                <a:solidFill>
-                  <a:srgbClr val="1E293B"/>
-                </a:solidFill>
-              </a:defRPr>
-            </a:pPr>
-            <a:r>
-              <a:t>   Top of DNS tree. 13 logical root server addresses (replicated globally via Anycast routing). Returns TLD server referrals.</a:t>
+              <a:defRPr sz="1250">
+                <a:solidFill>
+                  <a:srgbClr val="0F172A"/>
+                </a:solidFill>
+              </a:defRPr>
+            </a:pPr>
+            <a:r>
+              <a:t>   A single centralized database would suffer single-point failure, massive traffic congestion, geographic distance delay, and impossible maintenance.</a:t>
             </a:r>
           </a:p>
           <a:p>
@@ -3529,29 +3668,29 @@
               <a:spcAft>
                 <a:spcPts val="200"/>
               </a:spcAft>
-              <a:defRPr b="1" sz="1500">
+              <a:defRPr b="1" sz="1450">
                 <a:solidFill>
                   <a:srgbClr val="0F1E4A"/>
                 </a:solidFill>
               </a:defRPr>
             </a:pPr>
             <a:r>
-              <a:t>• Top-Level Domain (TLD) Servers</a:t>
+              <a:t>• Root DNS Servers</a:t>
             </a:r>
           </a:p>
           <a:p>
             <a:pPr>
               <a:spcAft>
-                <a:spcPts val="800"/>
+                <a:spcPts val="700"/>
               </a:spcAft>
-              <a:defRPr sz="1300">
-                <a:solidFill>
-                  <a:srgbClr val="1E293B"/>
-                </a:solidFill>
-              </a:defRPr>
-            </a:pPr>
-            <a:r>
-              <a:t>   Manage top-level domains: Generic TLDs (`.com`, `.org`, `.edu`) and Country-code TLDs (`.in`, `.uk`, `.us`). Returns authoritative server referrals.</a:t>
+              <a:defRPr sz="1250">
+                <a:solidFill>
+                  <a:srgbClr val="0F172A"/>
+                </a:solidFill>
+              </a:defRPr>
+            </a:pPr>
+            <a:r>
+              <a:t>   13 logical root server addresses (A through M, replicated worldwide via Anycast routing). Directs queries to appropriate TLD servers.</a:t>
             </a:r>
           </a:p>
           <a:p>
@@ -3559,29 +3698,29 @@
               <a:spcAft>
                 <a:spcPts val="200"/>
               </a:spcAft>
-              <a:defRPr b="1" sz="1500">
+              <a:defRPr b="1" sz="1450">
                 <a:solidFill>
                   <a:srgbClr val="0F1E4A"/>
                 </a:solidFill>
               </a:defRPr>
             </a:pPr>
             <a:r>
-              <a:t>• Authoritative DNS Servers</a:t>
+              <a:t>• Top-Level Domain (TLD) Servers</a:t>
             </a:r>
           </a:p>
           <a:p>
             <a:pPr>
               <a:spcAft>
-                <a:spcPts val="800"/>
+                <a:spcPts val="700"/>
               </a:spcAft>
-              <a:defRPr sz="1300">
-                <a:solidFill>
-                  <a:srgbClr val="1E293B"/>
-                </a:solidFill>
-              </a:defRPr>
-            </a:pPr>
-            <a:r>
-              <a:t>   Maintained by organizations/service providers. Stores actual mappings for organization's publicly accessible hosts.</a:t>
+              <a:defRPr sz="1250">
+                <a:solidFill>
+                  <a:srgbClr val="0F172A"/>
+                </a:solidFill>
+              </a:defRPr>
+            </a:pPr>
+            <a:r>
+              <a:t>   Responsible for generic TLDs (`.com`, `.org`, `.net`, `.edu`) and country-code ccTLDs (`.in`, `.uk`, `.de`, `.jp`).</a:t>
             </a:r>
           </a:p>
           <a:p>
@@ -3589,29 +3728,59 @@
               <a:spcAft>
                 <a:spcPts val="200"/>
               </a:spcAft>
-              <a:defRPr b="1" sz="1500">
+              <a:defRPr b="1" sz="1450">
                 <a:solidFill>
                   <a:srgbClr val="0F1E4A"/>
                 </a:solidFill>
               </a:defRPr>
             </a:pPr>
             <a:r>
-              <a:t>• Local DNS Resolvers</a:t>
+              <a:t>• Authoritative DNS Servers</a:t>
             </a:r>
           </a:p>
           <a:p>
             <a:pPr>
               <a:spcAft>
-                <a:spcPts val="800"/>
+                <a:spcPts val="700"/>
               </a:spcAft>
-              <a:defRPr sz="1300">
-                <a:solidFill>
-                  <a:srgbClr val="1E293B"/>
-                </a:solidFill>
-              </a:defRPr>
-            </a:pPr>
-            <a:r>
-              <a:t>   Operated by ISPs / enterprise networks. Intercepts host queries and performs DNS tree resolution on behalf of the client.</a:t>
+              <a:defRPr sz="1250">
+                <a:solidFill>
+                  <a:srgbClr val="0F172A"/>
+                </a:solidFill>
+              </a:defRPr>
+            </a:pPr>
+            <a:r>
+              <a:t>   Maintained by organizations/service providers containing the definitive, official mapping records for an institution's public hosts.</a:t>
+            </a:r>
+          </a:p>
+          <a:p>
+            <a:pPr>
+              <a:spcAft>
+                <a:spcPts val="200"/>
+              </a:spcAft>
+              <a:defRPr b="1" sz="1450">
+                <a:solidFill>
+                  <a:srgbClr val="0F1E4A"/>
+                </a:solidFill>
+              </a:defRPr>
+            </a:pPr>
+            <a:r>
+              <a:t>• Local DNS Name Server (Resolver)</a:t>
+            </a:r>
+          </a:p>
+          <a:p>
+            <a:pPr>
+              <a:spcAft>
+                <a:spcPts val="700"/>
+              </a:spcAft>
+              <a:defRPr sz="1250">
+                <a:solidFill>
+                  <a:srgbClr val="0F172A"/>
+                </a:solidFill>
+              </a:defRPr>
+            </a:pPr>
+            <a:r>
+              <a:t>   ISP / Campus resolver (e.g., Google 8.8.8.8, Cloudflare 1.1.1.1) acting as proxy intermediary cache for client queries.</a:t>
             </a:r>
           </a:p>
         </p:txBody>
@@ -3624,14 +3793,14 @@
         </p:nvSpPr>
         <p:spPr>
           <a:xfrm>
-            <a:off x="7955279" y="1280160"/>
-            <a:ext cx="3566160" cy="4846320"/>
+            <a:off x="7955279" y="1234440"/>
+            <a:ext cx="3566160" cy="4892040"/>
           </a:xfrm>
           <a:prstGeom prst="roundRect">
             <a:avLst/>
           </a:prstGeom>
           <a:solidFill>
-            <a:srgbClr val="F1F5F9"/>
+            <a:srgbClr val="F8FAFC"/>
           </a:solidFill>
           <a:ln w="19050">
             <a:solidFill>
@@ -3669,7 +3838,7 @@
         </p:nvSpPr>
         <p:spPr>
           <a:xfrm>
-            <a:off x="8138160" y="1417320"/>
+            <a:off x="8138160" y="1371600"/>
             <a:ext cx="3200400" cy="4572000"/>
           </a:xfrm>
           <a:prstGeom prst="rect">
@@ -3694,7 +3863,7 @@
               </a:defRPr>
             </a:pPr>
             <a:r>
-              <a:t>DNS Server Hierarchy</a:t>
+              <a:t>DNS Hierarchy</a:t>
             </a:r>
           </a:p>
           <a:p>
@@ -3704,12 +3873,12 @@
               </a:spcAft>
               <a:defRPr sz="1200">
                 <a:solidFill>
-                  <a:srgbClr val="1E293B"/>
-                </a:solidFill>
-              </a:defRPr>
-            </a:pPr>
-            <a:r>
-              <a:t>→ 1. Root DNS Servers (13)</a:t>
+                  <a:srgbClr val="0F172A"/>
+                </a:solidFill>
+              </a:defRPr>
+            </a:pPr>
+            <a:r>
+              <a:t>→ Root Servers: Global root '.'</a:t>
             </a:r>
           </a:p>
           <a:p>
@@ -3719,12 +3888,12 @@
               </a:spcAft>
               <a:defRPr sz="1200">
                 <a:solidFill>
-                  <a:srgbClr val="1E293B"/>
-                </a:solidFill>
-              </a:defRPr>
-            </a:pPr>
-            <a:r>
-              <a:t>→ 2. TLD Servers (.com, .in, .edu)</a:t>
+                  <a:srgbClr val="0F172A"/>
+                </a:solidFill>
+              </a:defRPr>
+            </a:pPr>
+            <a:r>
+              <a:t>→ TLD Servers: .com, .in, .org</a:t>
             </a:r>
           </a:p>
           <a:p>
@@ -3734,12 +3903,12 @@
               </a:spcAft>
               <a:defRPr sz="1200">
                 <a:solidFill>
-                  <a:srgbClr val="1E293B"/>
-                </a:solidFill>
-              </a:defRPr>
-            </a:pPr>
-            <a:r>
-              <a:t>→ 3. Authoritative Servers (vjcet.ac.in)</a:t>
+                  <a:srgbClr val="0F172A"/>
+                </a:solidFill>
+              </a:defRPr>
+            </a:pPr>
+            <a:r>
+              <a:t>→ Authoritative: vjcet.ac.in</a:t>
             </a:r>
           </a:p>
           <a:p>
@@ -3749,12 +3918,27 @@
               </a:spcAft>
               <a:defRPr sz="1200">
                 <a:solidFill>
-                  <a:srgbClr val="1E293B"/>
-                </a:solidFill>
-              </a:defRPr>
-            </a:pPr>
-            <a:r>
-              <a:t>→ 4. Local Resolvers (ISP / 8.8.8.8)</a:t>
+                  <a:srgbClr val="0F172A"/>
+                </a:solidFill>
+              </a:defRPr>
+            </a:pPr>
+            <a:r>
+              <a:t>→ Local Resolver: ISP DNS cache</a:t>
+            </a:r>
+          </a:p>
+          <a:p>
+            <a:pPr>
+              <a:spcAft>
+                <a:spcPts val="600"/>
+              </a:spcAft>
+              <a:defRPr sz="1200">
+                <a:solidFill>
+                  <a:srgbClr val="0F172A"/>
+                </a:solidFill>
+              </a:defRPr>
+            </a:pPr>
+            <a:r>
+              <a:t>→ Runs on UDP Port 53</a:t>
             </a:r>
           </a:p>
         </p:txBody>
@@ -3767,8 +3951,8 @@
         </p:nvSpPr>
         <p:spPr>
           <a:xfrm>
-            <a:off x="731520" y="6309360"/>
-            <a:ext cx="10789920" cy="365760"/>
+            <a:off x="731520" y="6327648"/>
+            <a:ext cx="10789920" cy="320040"/>
           </a:xfrm>
           <a:prstGeom prst="rect">
             <a:avLst/>
@@ -3790,6 +3974,41 @@
             </a:pPr>
             <a:r>
               <a:t>PCCST501 Computer Networks | KTU 2024 Scheme | Prof. Anju Markose | Assistant Professor, Dept. of CSE | VJCET</a:t>
+            </a:r>
+          </a:p>
+        </p:txBody>
+      </p:sp>
+      <p:sp>
+        <p:nvSpPr>
+          <p:cNvPr id="10" name="TextBox 9"/>
+          <p:cNvSpPr txBox="1"/>
+          <p:nvPr/>
+        </p:nvSpPr>
+        <p:spPr>
+          <a:xfrm>
+            <a:off x="6858000" y="6327648"/>
+            <a:ext cx="4572000" cy="320040"/>
+          </a:xfrm>
+          <a:prstGeom prst="rect">
+            <a:avLst/>
+          </a:prstGeom>
+          <a:noFill/>
+        </p:spPr>
+        <p:txBody>
+          <a:bodyPr wrap="none">
+            <a:spAutoFit/>
+          </a:bodyPr>
+          <a:lstStyle/>
+          <a:p>
+            <a:pPr algn="r">
+              <a:defRPr sz="950">
+                <a:solidFill>
+                  <a:srgbClr val="64748B"/>
+                </a:solidFill>
+              </a:defRPr>
+            </a:pPr>
+            <a:r>
+              <a:t>Dept. of CSE, VJCET</a:t>
             </a:r>
           </a:p>
         </p:txBody>
@@ -3921,14 +4140,14 @@
           <a:lstStyle/>
           <a:p>
             <a:pPr>
-              <a:defRPr b="1" sz="2300">
+              <a:defRPr b="1" sz="2200">
                 <a:solidFill>
                   <a:srgbClr val="F8FAFC"/>
                 </a:solidFill>
               </a:defRPr>
             </a:pPr>
             <a:r>
-              <a:t>1.7.2 DNS Query Resolution: Recursive vs Iterative</a:t>
+              <a:t>1.7.2 DNS Resolution Mechanisms: Iterative vs Recursive</a:t>
             </a:r>
           </a:p>
         </p:txBody>
@@ -3963,7 +4182,7 @@
               </a:defRPr>
             </a:pPr>
             <a:r>
-              <a:t>M1.7 RESOLUTION METHODS</a:t>
+              <a:t>M1.7 RESOLUTION COMPARISON</a:t>
             </a:r>
           </a:p>
         </p:txBody>
@@ -3976,18 +4195,18 @@
         </p:nvSpPr>
         <p:spPr>
           <a:xfrm>
-            <a:off x="731520" y="1280160"/>
-            <a:ext cx="5212080" cy="4846320"/>
+            <a:off x="731520" y="1234440"/>
+            <a:ext cx="5212080" cy="4892040"/>
           </a:xfrm>
           <a:prstGeom prst="roundRect">
             <a:avLst/>
           </a:prstGeom>
           <a:solidFill>
-            <a:srgbClr val="F1F5F9"/>
+            <a:srgbClr val="F8FAFC"/>
           </a:solidFill>
           <a:ln w="19050">
             <a:solidFill>
-              <a:srgbClr val="0E7490"/>
+              <a:srgbClr val="0F1E4A"/>
             </a:solidFill>
           </a:ln>
         </p:spPr>
@@ -4021,7 +4240,7 @@
         </p:nvSpPr>
         <p:spPr>
           <a:xfrm>
-            <a:off x="914400" y="1417320"/>
+            <a:off x="914400" y="1371600"/>
             <a:ext cx="4846320" cy="4572000"/>
           </a:xfrm>
           <a:prstGeom prst="rect">
@@ -4037,76 +4256,76 @@
           <a:p>
             <a:pPr>
               <a:spcAft>
-                <a:spcPts val="1200"/>
+                <a:spcPts val="1000"/>
               </a:spcAft>
-              <a:defRPr b="1" sz="1600">
+              <a:defRPr b="1" sz="1550">
                 <a:solidFill>
                   <a:srgbClr val="0F1E4A"/>
                 </a:solidFill>
               </a:defRPr>
             </a:pPr>
             <a:r>
-              <a:t>Recursive DNS Resolution</a:t>
+              <a:t>Iterative DNS Query</a:t>
             </a:r>
           </a:p>
           <a:p>
             <a:pPr>
               <a:spcAft>
-                <a:spcPts val="600"/>
+                <a:spcPts val="500"/>
               </a:spcAft>
-              <a:defRPr sz="1250">
-                <a:solidFill>
-                  <a:srgbClr val="1E293B"/>
-                </a:solidFill>
-              </a:defRPr>
-            </a:pPr>
-            <a:r>
-              <a:t>• Client Burden: Client/resolver offloads full lookup work to queried server</a:t>
+              <a:defRPr sz="1200">
+                <a:solidFill>
+                  <a:srgbClr val="0F172A"/>
+                </a:solidFill>
+              </a:defRPr>
+            </a:pPr>
+            <a:r>
+              <a:t>• Client Interaction: Local DNS server handles resolution</a:t>
             </a:r>
           </a:p>
           <a:p>
             <a:pPr>
               <a:spcAft>
-                <a:spcPts val="600"/>
+                <a:spcPts val="500"/>
               </a:spcAft>
-              <a:defRPr sz="1250">
-                <a:solidFill>
-                  <a:srgbClr val="1E293B"/>
-                </a:solidFill>
-              </a:defRPr>
-            </a:pPr>
-            <a:r>
-              <a:t>• Process: Server contacts other servers sequentially until answer found</a:t>
+              <a:defRPr sz="1200">
+                <a:solidFill>
+                  <a:srgbClr val="0F172A"/>
+                </a:solidFill>
+              </a:defRPr>
+            </a:pPr>
+            <a:r>
+              <a:t>• Server Response: Contacted server replies: 'I don't know the exact IP, but you should ask this next DNS server' (returns referral delegation)</a:t>
             </a:r>
           </a:p>
           <a:p>
             <a:pPr>
               <a:spcAft>
-                <a:spcPts val="600"/>
+                <a:spcPts val="500"/>
               </a:spcAft>
-              <a:defRPr sz="1250">
-                <a:solidFill>
-                  <a:srgbClr val="1E293B"/>
-                </a:solidFill>
-              </a:defRPr>
-            </a:pPr>
-            <a:r>
-              <a:t>• Root Server Impact: Places heavy processing &amp; memory burden on higher servers</a:t>
+              <a:defRPr sz="1200">
+                <a:solidFill>
+                  <a:srgbClr val="0F172A"/>
+                </a:solidFill>
+              </a:defRPr>
+            </a:pPr>
+            <a:r>
+              <a:t>• Query Load: Local DNS server sequentially queries Root -&gt; TLD -&gt; Authoritative</a:t>
             </a:r>
           </a:p>
           <a:p>
             <a:pPr>
               <a:spcAft>
-                <a:spcPts val="600"/>
+                <a:spcPts val="500"/>
               </a:spcAft>
-              <a:defRPr sz="1250">
-                <a:solidFill>
-                  <a:srgbClr val="1E293B"/>
-                </a:solidFill>
-              </a:defRPr>
-            </a:pPr>
-            <a:r>
-              <a:t>• Usage: Standard between Client Host and Local DNS Resolver</a:t>
+              <a:defRPr sz="1200">
+                <a:solidFill>
+                  <a:srgbClr val="0F172A"/>
+                </a:solidFill>
+              </a:defRPr>
+            </a:pPr>
+            <a:r>
+              <a:t>• Server Burden: Puts minimal load on Root and TLD server infrastructure</a:t>
             </a:r>
           </a:p>
         </p:txBody>
@@ -4119,8 +4338,8 @@
         </p:nvSpPr>
         <p:spPr>
           <a:xfrm>
-            <a:off x="6309360" y="1280160"/>
-            <a:ext cx="5212080" cy="4846320"/>
+            <a:off x="6309360" y="1234440"/>
+            <a:ext cx="5212080" cy="4892040"/>
           </a:xfrm>
           <a:prstGeom prst="roundRect">
             <a:avLst/>
@@ -4130,7 +4349,7 @@
           </a:solidFill>
           <a:ln w="19050">
             <a:solidFill>
-              <a:srgbClr val="0F1E4A"/>
+              <a:srgbClr val="0E7490"/>
             </a:solidFill>
           </a:ln>
         </p:spPr>
@@ -4164,7 +4383,7 @@
         </p:nvSpPr>
         <p:spPr>
           <a:xfrm>
-            <a:off x="6492240" y="1417320"/>
+            <a:off x="6492240" y="1371600"/>
             <a:ext cx="4846320" cy="4572000"/>
           </a:xfrm>
           <a:prstGeom prst="rect">
@@ -4180,76 +4399,76 @@
           <a:p>
             <a:pPr>
               <a:spcAft>
-                <a:spcPts val="1200"/>
+                <a:spcPts val="1000"/>
               </a:spcAft>
-              <a:defRPr b="1" sz="1600">
+              <a:defRPr b="1" sz="1550">
                 <a:solidFill>
                   <a:srgbClr val="0E7490"/>
                 </a:solidFill>
               </a:defRPr>
             </a:pPr>
             <a:r>
-              <a:t>Iterative DNS Resolution</a:t>
+              <a:t>Recursive DNS Query</a:t>
             </a:r>
           </a:p>
           <a:p>
             <a:pPr>
               <a:spcAft>
-                <a:spcPts val="600"/>
+                <a:spcPts val="500"/>
               </a:spcAft>
-              <a:defRPr sz="1250">
-                <a:solidFill>
-                  <a:srgbClr val="1E293B"/>
-                </a:solidFill>
-              </a:defRPr>
-            </a:pPr>
-            <a:r>
-              <a:t>• Referral Model: Queried server responds immediately with 'I do not know, ask this server next'</a:t>
+              <a:defRPr sz="1200">
+                <a:solidFill>
+                  <a:srgbClr val="0F172A"/>
+                </a:solidFill>
+              </a:defRPr>
+            </a:pPr>
+            <a:r>
+              <a:t>• Server Action: Contacted server takes full responsibility to obtain the final IP address on behalf of the requester</a:t>
             </a:r>
           </a:p>
           <a:p>
             <a:pPr>
               <a:spcAft>
-                <a:spcPts val="600"/>
+                <a:spcPts val="500"/>
               </a:spcAft>
-              <a:defRPr sz="1250">
-                <a:solidFill>
-                  <a:srgbClr val="1E293B"/>
-                </a:solidFill>
-              </a:defRPr>
-            </a:pPr>
-            <a:r>
-              <a:t>• Process: Local resolver contacts Root -&gt; TLD -&gt; Authoritative itself</a:t>
+              <a:defRPr sz="1200">
+                <a:solidFill>
+                  <a:srgbClr val="0F172A"/>
+                </a:solidFill>
+              </a:defRPr>
+            </a:pPr>
+            <a:r>
+              <a:t>• Chain of Queries: Client -&gt; Local -&gt; Root -&gt; TLD -&gt; Authoritative (and returns back up the chain)</a:t>
             </a:r>
           </a:p>
           <a:p>
             <a:pPr>
               <a:spcAft>
-                <a:spcPts val="600"/>
+                <a:spcPts val="500"/>
               </a:spcAft>
-              <a:defRPr sz="1250">
-                <a:solidFill>
-                  <a:srgbClr val="1E293B"/>
-                </a:solidFill>
-              </a:defRPr>
-            </a:pPr>
-            <a:r>
-              <a:t>• Root Server Impact: Lightweight; preserves root/TLD server capacity</a:t>
+              <a:defRPr sz="1200">
+                <a:solidFill>
+                  <a:srgbClr val="0F172A"/>
+                </a:solidFill>
+              </a:defRPr>
+            </a:pPr>
+            <a:r>
+              <a:t>• Server Burden: Heavy connection holding state and CPU burden on high-level servers; generally restricted at Root/TLD</a:t>
             </a:r>
           </a:p>
           <a:p>
             <a:pPr>
               <a:spcAft>
-                <a:spcPts val="600"/>
+                <a:spcPts val="500"/>
               </a:spcAft>
-              <a:defRPr sz="1250">
-                <a:solidFill>
-                  <a:srgbClr val="1E293B"/>
-                </a:solidFill>
-              </a:defRPr>
-            </a:pPr>
-            <a:r>
-              <a:t>• Usage: Standard among Local Resolver, Root, and TLD servers</a:t>
+              <a:defRPr sz="1200">
+                <a:solidFill>
+                  <a:srgbClr val="0F172A"/>
+                </a:solidFill>
+              </a:defRPr>
+            </a:pPr>
+            <a:r>
+              <a:t>• Standard Practice: Client to Local DNS is Recursive; Local DNS to Root/TLD/Authoritative is Iterative</a:t>
             </a:r>
           </a:p>
         </p:txBody>
@@ -4262,8 +4481,8 @@
         </p:nvSpPr>
         <p:spPr>
           <a:xfrm>
-            <a:off x="731520" y="6309360"/>
-            <a:ext cx="10789920" cy="365760"/>
+            <a:off x="731520" y="6327648"/>
+            <a:ext cx="10789920" cy="320040"/>
           </a:xfrm>
           <a:prstGeom prst="rect">
             <a:avLst/>
@@ -4285,6 +4504,41 @@
             </a:pPr>
             <a:r>
               <a:t>PCCST501 Computer Networks | KTU 2024 Scheme | Prof. Anju Markose | Assistant Professor, Dept. of CSE | VJCET</a:t>
+            </a:r>
+          </a:p>
+        </p:txBody>
+      </p:sp>
+      <p:sp>
+        <p:nvSpPr>
+          <p:cNvPr id="11" name="TextBox 10"/>
+          <p:cNvSpPr txBox="1"/>
+          <p:nvPr/>
+        </p:nvSpPr>
+        <p:spPr>
+          <a:xfrm>
+            <a:off x="6858000" y="6327648"/>
+            <a:ext cx="4572000" cy="320040"/>
+          </a:xfrm>
+          <a:prstGeom prst="rect">
+            <a:avLst/>
+          </a:prstGeom>
+          <a:noFill/>
+        </p:spPr>
+        <p:txBody>
+          <a:bodyPr wrap="none">
+            <a:spAutoFit/>
+          </a:bodyPr>
+          <a:lstStyle/>
+          <a:p>
+            <a:pPr algn="r">
+              <a:defRPr sz="950">
+                <a:solidFill>
+                  <a:srgbClr val="64748B"/>
+                </a:solidFill>
+              </a:defRPr>
+            </a:pPr>
+            <a:r>
+              <a:t>Dept. of CSE, VJCET</a:t>
             </a:r>
           </a:p>
         </p:txBody>
@@ -4416,14 +4670,14 @@
           <a:lstStyle/>
           <a:p>
             <a:pPr>
-              <a:defRPr b="1" sz="2300">
+              <a:defRPr b="1" sz="2200">
                 <a:solidFill>
                   <a:srgbClr val="F8FAFC"/>
                 </a:solidFill>
               </a:defRPr>
             </a:pPr>
             <a:r>
-              <a:t>1.7.3 DNS Resource Records (RR) &amp; Caching</a:t>
+              <a:t>1.7.3 DNS Resource Records (RR) &amp; Message Caching</a:t>
             </a:r>
           </a:p>
         </p:txBody>
@@ -4458,7 +4712,7 @@
               </a:defRPr>
             </a:pPr>
             <a:r>
-              <a:t>M1.7 DNS RECORDS &amp; CACHE</a:t>
+              <a:t>M1.7 RESOURCE RECORDS</a:t>
             </a:r>
           </a:p>
         </p:txBody>
@@ -4471,7 +4725,7 @@
         </p:nvSpPr>
         <p:spPr>
           <a:xfrm>
-            <a:off x="731520" y="1280160"/>
+            <a:off x="731520" y="1234440"/>
             <a:ext cx="6858000" cy="4937760"/>
           </a:xfrm>
           <a:prstGeom prst="rect">
@@ -4489,29 +4743,29 @@
               <a:spcAft>
                 <a:spcPts val="200"/>
               </a:spcAft>
-              <a:defRPr b="1" sz="1500">
+              <a:defRPr b="1" sz="1450">
                 <a:solidFill>
                   <a:srgbClr val="0F1E4A"/>
                 </a:solidFill>
               </a:defRPr>
             </a:pPr>
             <a:r>
-              <a:t>• Resource Record Format</a:t>
+              <a:t>• Resource Record (RR) 4-Tuple Format</a:t>
             </a:r>
           </a:p>
           <a:p>
             <a:pPr>
               <a:spcAft>
-                <a:spcPts val="800"/>
+                <a:spcPts val="700"/>
               </a:spcAft>
-              <a:defRPr sz="1300">
-                <a:solidFill>
-                  <a:srgbClr val="1E293B"/>
-                </a:solidFill>
-              </a:defRPr>
-            </a:pPr>
-            <a:r>
-              <a:t>   Stored as 4-tuple: `(Name, Value, Type, TTL)`.</a:t>
+              <a:defRPr sz="1250">
+                <a:solidFill>
+                  <a:srgbClr val="0F172A"/>
+                </a:solidFill>
+              </a:defRPr>
+            </a:pPr>
+            <a:r>
+              <a:t>   `(Name, Value, Type, TTL)` stored in DNS database.</a:t>
             </a:r>
           </a:p>
           <a:p>
@@ -4519,29 +4773,29 @@
               <a:spcAft>
                 <a:spcPts val="200"/>
               </a:spcAft>
-              <a:defRPr b="1" sz="1500">
+              <a:defRPr b="1" sz="1450">
                 <a:solidFill>
                   <a:srgbClr val="0F1E4A"/>
                 </a:solidFill>
               </a:defRPr>
             </a:pPr>
             <a:r>
-              <a:t>• Type A</a:t>
+              <a:t>• Type A Record</a:t>
             </a:r>
           </a:p>
           <a:p>
             <a:pPr>
               <a:spcAft>
-                <a:spcPts val="800"/>
+                <a:spcPts val="700"/>
               </a:spcAft>
-              <a:defRPr sz="1300">
-                <a:solidFill>
-                  <a:srgbClr val="1E293B"/>
-                </a:solidFill>
-              </a:defRPr>
-            </a:pPr>
-            <a:r>
-              <a:t>   `Name` is hostname, `Value` is IPv4 address (e.g. `vjcet.ac.in -&gt; 103.112.212.10`).</a:t>
+              <a:defRPr sz="1250">
+                <a:solidFill>
+                  <a:srgbClr val="0F172A"/>
+                </a:solidFill>
+              </a:defRPr>
+            </a:pPr>
+            <a:r>
+              <a:t>   `Name` = Hostname, `Value` = IPv4 Address (e.g., `(vjcet.ac.in, 117.211.89.5, A, 3600)`).</a:t>
             </a:r>
           </a:p>
           <a:p>
@@ -4549,29 +4803,29 @@
               <a:spcAft>
                 <a:spcPts val="200"/>
               </a:spcAft>
-              <a:defRPr b="1" sz="1500">
+              <a:defRPr b="1" sz="1450">
                 <a:solidFill>
                   <a:srgbClr val="0F1E4A"/>
                 </a:solidFill>
               </a:defRPr>
             </a:pPr>
             <a:r>
-              <a:t>• Type AAAA</a:t>
+              <a:t>• Type AAAA Record</a:t>
             </a:r>
           </a:p>
           <a:p>
             <a:pPr>
               <a:spcAft>
-                <a:spcPts val="800"/>
+                <a:spcPts val="700"/>
               </a:spcAft>
-              <a:defRPr sz="1300">
-                <a:solidFill>
-                  <a:srgbClr val="1E293B"/>
-                </a:solidFill>
-              </a:defRPr>
-            </a:pPr>
-            <a:r>
-              <a:t>   `Name` is hostname, `Value` is IPv6 address.</a:t>
+              <a:defRPr sz="1250">
+                <a:solidFill>
+                  <a:srgbClr val="0F172A"/>
+                </a:solidFill>
+              </a:defRPr>
+            </a:pPr>
+            <a:r>
+              <a:t>   `Name` = Hostname, `Value` = 128-bit IPv6 Address.</a:t>
             </a:r>
           </a:p>
           <a:p>
@@ -4579,29 +4833,29 @@
               <a:spcAft>
                 <a:spcPts val="200"/>
               </a:spcAft>
-              <a:defRPr b="1" sz="1500">
+              <a:defRPr b="1" sz="1450">
                 <a:solidFill>
                   <a:srgbClr val="0F1E4A"/>
                 </a:solidFill>
               </a:defRPr>
             </a:pPr>
             <a:r>
-              <a:t>• Type CNAME</a:t>
+              <a:t>• Type CNAME Record</a:t>
             </a:r>
           </a:p>
           <a:p>
             <a:pPr>
               <a:spcAft>
-                <a:spcPts val="800"/>
+                <a:spcPts val="700"/>
               </a:spcAft>
-              <a:defRPr sz="1300">
-                <a:solidFill>
-                  <a:srgbClr val="1E293B"/>
-                </a:solidFill>
-              </a:defRPr>
-            </a:pPr>
-            <a:r>
-              <a:t>   `Name` is alias hostname, `Value` is canonical real hostname (e.g. `www.vjcet.ac.in -&gt; vjcet.ac.in`).</a:t>
+              <a:defRPr sz="1250">
+                <a:solidFill>
+                  <a:srgbClr val="0F172A"/>
+                </a:solidFill>
+              </a:defRPr>
+            </a:pPr>
+            <a:r>
+              <a:t>   `Name` = Alias hostname, `Value` = Canonical / True hostname (e.g., `(www.vjcet.org, vjcet.ac.in, CNAME, 86400)`).</a:t>
             </a:r>
           </a:p>
           <a:p>
@@ -4609,29 +4863,29 @@
               <a:spcAft>
                 <a:spcPts val="200"/>
               </a:spcAft>
-              <a:defRPr b="1" sz="1500">
+              <a:defRPr b="1" sz="1450">
                 <a:solidFill>
                   <a:srgbClr val="0F1E4A"/>
                 </a:solidFill>
               </a:defRPr>
             </a:pPr>
             <a:r>
-              <a:t>• Type MX</a:t>
+              <a:t>• Type NS Record</a:t>
             </a:r>
           </a:p>
           <a:p>
             <a:pPr>
               <a:spcAft>
-                <a:spcPts val="800"/>
+                <a:spcPts val="700"/>
               </a:spcAft>
-              <a:defRPr sz="1300">
-                <a:solidFill>
-                  <a:srgbClr val="1E293B"/>
-                </a:solidFill>
-              </a:defRPr>
-            </a:pPr>
-            <a:r>
-              <a:t>   `Name` is domain name, `Value` is mail server hostname handling email for domain.</a:t>
+              <a:defRPr sz="1250">
+                <a:solidFill>
+                  <a:srgbClr val="0F172A"/>
+                </a:solidFill>
+              </a:defRPr>
+            </a:pPr>
+            <a:r>
+              <a:t>   `Name` = Domain, `Value` = Hostname of Authoritative Name Server for domain (e.g., `(vjcet.ac.in, ns1.vjcet.ac.in, NS, 86400)`).</a:t>
             </a:r>
           </a:p>
           <a:p>
@@ -4639,29 +4893,29 @@
               <a:spcAft>
                 <a:spcPts val="200"/>
               </a:spcAft>
-              <a:defRPr b="1" sz="1500">
+              <a:defRPr b="1" sz="1450">
                 <a:solidFill>
                   <a:srgbClr val="0F1E4A"/>
                 </a:solidFill>
               </a:defRPr>
             </a:pPr>
             <a:r>
-              <a:t>• Type NS</a:t>
+              <a:t>• Type MX Record</a:t>
             </a:r>
           </a:p>
           <a:p>
             <a:pPr>
               <a:spcAft>
-                <a:spcPts val="800"/>
+                <a:spcPts val="700"/>
               </a:spcAft>
-              <a:defRPr sz="1300">
-                <a:solidFill>
-                  <a:srgbClr val="1E293B"/>
-                </a:solidFill>
-              </a:defRPr>
-            </a:pPr>
-            <a:r>
-              <a:t>   `Name` is domain name, `Value` is authoritative name server hostname.</a:t>
+              <a:defRPr sz="1250">
+                <a:solidFill>
+                  <a:srgbClr val="0F172A"/>
+                </a:solidFill>
+              </a:defRPr>
+            </a:pPr>
+            <a:r>
+              <a:t>   `Name` = Domain, `Value` = Hostname of Mail Server for domain (e.g., `(vjcet.ac.in, mail.vjcet.ac.in, MX, 3600)`).</a:t>
             </a:r>
           </a:p>
           <a:p>
@@ -4669,29 +4923,29 @@
               <a:spcAft>
                 <a:spcPts val="200"/>
               </a:spcAft>
-              <a:defRPr b="1" sz="1500">
+              <a:defRPr b="1" sz="1450">
                 <a:solidFill>
                   <a:srgbClr val="0F1E4A"/>
                 </a:solidFill>
               </a:defRPr>
             </a:pPr>
             <a:r>
-              <a:t>• DNS Caching</a:t>
+              <a:t>• DNS Caching &amp; TTL</a:t>
             </a:r>
           </a:p>
           <a:p>
             <a:pPr>
               <a:spcAft>
-                <a:spcPts val="800"/>
+                <a:spcPts val="700"/>
               </a:spcAft>
-              <a:defRPr sz="1300">
-                <a:solidFill>
-                  <a:srgbClr val="1E293B"/>
-                </a:solidFill>
-              </a:defRPr>
-            </a:pPr>
-            <a:r>
-              <a:t>   Resolvers cache learned RRs for duration specified by TTL (Time-to-Live). Drastically reduces internet latency and root server load.</a:t>
+              <a:defRPr sz="1250">
+                <a:solidFill>
+                  <a:srgbClr val="0F172A"/>
+                </a:solidFill>
+              </a:defRPr>
+            </a:pPr>
+            <a:r>
+              <a:t>   Resolvers cache mapping records for `TTL` seconds, dramatically reducing query delays and global root traffic.</a:t>
             </a:r>
           </a:p>
         </p:txBody>
@@ -4704,14 +4958,14 @@
         </p:nvSpPr>
         <p:spPr>
           <a:xfrm>
-            <a:off x="7955279" y="1280160"/>
-            <a:ext cx="3566160" cy="4846320"/>
+            <a:off x="7955279" y="1234440"/>
+            <a:ext cx="3566160" cy="4892040"/>
           </a:xfrm>
           <a:prstGeom prst="roundRect">
             <a:avLst/>
           </a:prstGeom>
           <a:solidFill>
-            <a:srgbClr val="F1F5F9"/>
+            <a:srgbClr val="F8FAFC"/>
           </a:solidFill>
           <a:ln w="19050">
             <a:solidFill>
@@ -4749,7 +5003,7 @@
         </p:nvSpPr>
         <p:spPr>
           <a:xfrm>
-            <a:off x="8138160" y="1417320"/>
+            <a:off x="8138160" y="1371600"/>
             <a:ext cx="3200400" cy="4572000"/>
           </a:xfrm>
           <a:prstGeom prst="rect">
@@ -4774,7 +5028,7 @@
               </a:defRPr>
             </a:pPr>
             <a:r>
-              <a:t>Key Record Types</a:t>
+              <a:t>RR Summary Table</a:t>
             </a:r>
           </a:p>
           <a:p>
@@ -4784,12 +5038,12 @@
               </a:spcAft>
               <a:defRPr sz="1200">
                 <a:solidFill>
-                  <a:srgbClr val="1E293B"/>
-                </a:solidFill>
-              </a:defRPr>
-            </a:pPr>
-            <a:r>
-              <a:t>→ A: Hostname -&gt; IPv4</a:t>
+                  <a:srgbClr val="0F172A"/>
+                </a:solidFill>
+              </a:defRPr>
+            </a:pPr>
+            <a:r>
+              <a:t>→ Type A: Hostname -&gt; IPv4</a:t>
             </a:r>
           </a:p>
           <a:p>
@@ -4799,12 +5053,12 @@
               </a:spcAft>
               <a:defRPr sz="1200">
                 <a:solidFill>
-                  <a:srgbClr val="1E293B"/>
-                </a:solidFill>
-              </a:defRPr>
-            </a:pPr>
-            <a:r>
-              <a:t>→ AAAA: Hostname -&gt; IPv6</a:t>
+                  <a:srgbClr val="0F172A"/>
+                </a:solidFill>
+              </a:defRPr>
+            </a:pPr>
+            <a:r>
+              <a:t>→ Type AAAA: Hostname -&gt; IPv6</a:t>
             </a:r>
           </a:p>
           <a:p>
@@ -4814,12 +5068,12 @@
               </a:spcAft>
               <a:defRPr sz="1200">
                 <a:solidFill>
-                  <a:srgbClr val="1E293B"/>
-                </a:solidFill>
-              </a:defRPr>
-            </a:pPr>
-            <a:r>
-              <a:t>→ CNAME: Alias -&gt; Canonical Name</a:t>
+                  <a:srgbClr val="0F172A"/>
+                </a:solidFill>
+              </a:defRPr>
+            </a:pPr>
+            <a:r>
+              <a:t>→ Type CNAME: Alias -&gt; Canonical</a:t>
             </a:r>
           </a:p>
           <a:p>
@@ -4829,12 +5083,12 @@
               </a:spcAft>
               <a:defRPr sz="1200">
                 <a:solidFill>
-                  <a:srgbClr val="1E293B"/>
-                </a:solidFill>
-              </a:defRPr>
-            </a:pPr>
-            <a:r>
-              <a:t>→ MX: Domain -&gt; Mail Server</a:t>
+                  <a:srgbClr val="0F172A"/>
+                </a:solidFill>
+              </a:defRPr>
+            </a:pPr>
+            <a:r>
+              <a:t>→ Type NS: Domain -&gt; Name Server</a:t>
             </a:r>
           </a:p>
           <a:p>
@@ -4844,12 +5098,12 @@
               </a:spcAft>
               <a:defRPr sz="1200">
                 <a:solidFill>
-                  <a:srgbClr val="1E293B"/>
-                </a:solidFill>
-              </a:defRPr>
-            </a:pPr>
-            <a:r>
-              <a:t>→ NS: Domain -&gt; Authoritative Server</a:t>
+                  <a:srgbClr val="0F172A"/>
+                </a:solidFill>
+              </a:defRPr>
+            </a:pPr>
+            <a:r>
+              <a:t>→ Type MX: Domain -&gt; Mail Server</a:t>
             </a:r>
           </a:p>
           <a:p>
@@ -4859,12 +5113,12 @@
               </a:spcAft>
               <a:defRPr sz="1200">
                 <a:solidFill>
-                  <a:srgbClr val="1E293B"/>
-                </a:solidFill>
-              </a:defRPr>
-            </a:pPr>
-            <a:r>
-              <a:t>→ TTL: Cache validity time (sec)</a:t>
+                  <a:srgbClr val="0F172A"/>
+                </a:solidFill>
+              </a:defRPr>
+            </a:pPr>
+            <a:r>
+              <a:t>→ Type PTR: IP -&gt; Hostname (Reverse)</a:t>
             </a:r>
           </a:p>
         </p:txBody>
@@ -4877,8 +5131,8 @@
         </p:nvSpPr>
         <p:spPr>
           <a:xfrm>
-            <a:off x="731520" y="6309360"/>
-            <a:ext cx="10789920" cy="365760"/>
+            <a:off x="731520" y="6327648"/>
+            <a:ext cx="10789920" cy="320040"/>
           </a:xfrm>
           <a:prstGeom prst="rect">
             <a:avLst/>
@@ -4900,6 +5154,541 @@
             </a:pPr>
             <a:r>
               <a:t>PCCST501 Computer Networks | KTU 2024 Scheme | Prof. Anju Markose | Assistant Professor, Dept. of CSE | VJCET</a:t>
+            </a:r>
+          </a:p>
+        </p:txBody>
+      </p:sp>
+      <p:sp>
+        <p:nvSpPr>
+          <p:cNvPr id="10" name="TextBox 9"/>
+          <p:cNvSpPr txBox="1"/>
+          <p:nvPr/>
+        </p:nvSpPr>
+        <p:spPr>
+          <a:xfrm>
+            <a:off x="6858000" y="6327648"/>
+            <a:ext cx="4572000" cy="320040"/>
+          </a:xfrm>
+          <a:prstGeom prst="rect">
+            <a:avLst/>
+          </a:prstGeom>
+          <a:noFill/>
+        </p:spPr>
+        <p:txBody>
+          <a:bodyPr wrap="none">
+            <a:spAutoFit/>
+          </a:bodyPr>
+          <a:lstStyle/>
+          <a:p>
+            <a:pPr algn="r">
+              <a:defRPr sz="950">
+                <a:solidFill>
+                  <a:srgbClr val="64748B"/>
+                </a:solidFill>
+              </a:defRPr>
+            </a:pPr>
+            <a:r>
+              <a:t>Dept. of CSE, VJCET</a:t>
+            </a:r>
+          </a:p>
+        </p:txBody>
+      </p:sp>
+    </p:spTree>
+  </p:cSld>
+  <p:clrMapOvr>
+    <a:masterClrMapping/>
+  </p:clrMapOvr>
+</p:sld>
+</file>
+
+<file path=ppt/slides/slide5.xml><?xml version="1.0" encoding="utf-8"?>
+<p:sld xmlns:a="http://schemas.openxmlformats.org/drawingml/2006/main" xmlns:p="http://schemas.openxmlformats.org/presentationml/2006/main" xmlns:r="http://schemas.openxmlformats.org/officeDocument/2006/relationships">
+  <p:cSld>
+    <p:spTree>
+      <p:nvGrpSpPr>
+        <p:cNvPr id="1" name=""/>
+        <p:cNvGrpSpPr/>
+        <p:nvPr/>
+      </p:nvGrpSpPr>
+      <p:grpSpPr/>
+      <p:sp>
+        <p:nvSpPr>
+          <p:cNvPr id="2" name="Rectangle 1"/>
+          <p:cNvSpPr/>
+          <p:nvPr/>
+        </p:nvSpPr>
+        <p:spPr>
+          <a:xfrm>
+            <a:off x="0" y="0"/>
+            <a:ext cx="12191695" cy="1005840"/>
+          </a:xfrm>
+          <a:prstGeom prst="rect">
+            <a:avLst/>
+          </a:prstGeom>
+          <a:solidFill>
+            <a:srgbClr val="0F1E4A"/>
+          </a:solidFill>
+          <a:ln>
+            <a:noFill/>
+          </a:ln>
+        </p:spPr>
+        <p:style>
+          <a:lnRef idx="1">
+            <a:schemeClr val="accent1"/>
+          </a:lnRef>
+          <a:fillRef idx="3">
+            <a:schemeClr val="accent1"/>
+          </a:fillRef>
+          <a:effectRef idx="2">
+            <a:schemeClr val="accent1"/>
+          </a:effectRef>
+          <a:fontRef idx="minor">
+            <a:schemeClr val="lt1"/>
+          </a:fontRef>
+        </p:style>
+        <p:txBody>
+          <a:bodyPr rtlCol="0" anchor="ctr"/>
+          <a:lstStyle/>
+          <a:p>
+            <a:pPr algn="ctr"/>
+          </a:p>
+        </p:txBody>
+      </p:sp>
+      <p:sp>
+        <p:nvSpPr>
+          <p:cNvPr id="3" name="Rectangle 2"/>
+          <p:cNvSpPr/>
+          <p:nvPr/>
+        </p:nvSpPr>
+        <p:spPr>
+          <a:xfrm>
+            <a:off x="0" y="969264"/>
+            <a:ext cx="12191695" cy="36576"/>
+          </a:xfrm>
+          <a:prstGeom prst="rect">
+            <a:avLst/>
+          </a:prstGeom>
+          <a:solidFill>
+            <a:srgbClr val="D97706"/>
+          </a:solidFill>
+          <a:ln>
+            <a:noFill/>
+          </a:ln>
+        </p:spPr>
+        <p:style>
+          <a:lnRef idx="1">
+            <a:schemeClr val="accent1"/>
+          </a:lnRef>
+          <a:fillRef idx="3">
+            <a:schemeClr val="accent1"/>
+          </a:fillRef>
+          <a:effectRef idx="2">
+            <a:schemeClr val="accent1"/>
+          </a:effectRef>
+          <a:fontRef idx="minor">
+            <a:schemeClr val="lt1"/>
+          </a:fontRef>
+        </p:style>
+        <p:txBody>
+          <a:bodyPr rtlCol="0" anchor="ctr"/>
+          <a:lstStyle/>
+          <a:p>
+            <a:pPr algn="ctr"/>
+          </a:p>
+        </p:txBody>
+      </p:sp>
+      <p:sp>
+        <p:nvSpPr>
+          <p:cNvPr id="4" name="TextBox 3"/>
+          <p:cNvSpPr txBox="1"/>
+          <p:nvPr/>
+        </p:nvSpPr>
+        <p:spPr>
+          <a:xfrm>
+            <a:off x="731520" y="164592"/>
+            <a:ext cx="8412480" cy="685800"/>
+          </a:xfrm>
+          <a:prstGeom prst="rect">
+            <a:avLst/>
+          </a:prstGeom>
+          <a:noFill/>
+        </p:spPr>
+        <p:txBody>
+          <a:bodyPr wrap="none">
+            <a:spAutoFit/>
+          </a:bodyPr>
+          <a:lstStyle/>
+          <a:p>
+            <a:pPr>
+              <a:defRPr b="1" sz="2100">
+                <a:solidFill>
+                  <a:srgbClr val="F8FAFC"/>
+                </a:solidFill>
+              </a:defRPr>
+            </a:pPr>
+            <a:r>
+              <a:t>🎯 Exam Booster &amp; Review: Domain Name System (DNS)</a:t>
+            </a:r>
+          </a:p>
+        </p:txBody>
+      </p:sp>
+      <p:sp>
+        <p:nvSpPr>
+          <p:cNvPr id="5" name="TextBox 4"/>
+          <p:cNvSpPr txBox="1"/>
+          <p:nvPr/>
+        </p:nvSpPr>
+        <p:spPr>
+          <a:xfrm>
+            <a:off x="8229600" y="164592"/>
+            <a:ext cx="3291840" cy="685800"/>
+          </a:xfrm>
+          <a:prstGeom prst="rect">
+            <a:avLst/>
+          </a:prstGeom>
+          <a:noFill/>
+        </p:spPr>
+        <p:txBody>
+          <a:bodyPr wrap="none">
+            <a:spAutoFit/>
+          </a:bodyPr>
+          <a:lstStyle/>
+          <a:p>
+            <a:pPr algn="r">
+              <a:defRPr b="1" sz="1300">
+                <a:solidFill>
+                  <a:srgbClr val="D97706"/>
+                </a:solidFill>
+              </a:defRPr>
+            </a:pPr>
+            <a:r>
+              <a:t>M1.7</a:t>
+            </a:r>
+          </a:p>
+        </p:txBody>
+      </p:sp>
+      <p:sp>
+        <p:nvSpPr>
+          <p:cNvPr id="6" name="Rounded Rectangle 5"/>
+          <p:cNvSpPr/>
+          <p:nvPr/>
+        </p:nvSpPr>
+        <p:spPr>
+          <a:xfrm>
+            <a:off x="731520" y="1234440"/>
+            <a:ext cx="5303520" cy="4892040"/>
+          </a:xfrm>
+          <a:prstGeom prst="roundRect">
+            <a:avLst/>
+          </a:prstGeom>
+          <a:solidFill>
+            <a:srgbClr val="FEF3C7"/>
+          </a:solidFill>
+          <a:ln w="19050">
+            <a:solidFill>
+              <a:srgbClr val="D97706"/>
+            </a:solidFill>
+          </a:ln>
+        </p:spPr>
+        <p:style>
+          <a:lnRef idx="1">
+            <a:schemeClr val="accent1"/>
+          </a:lnRef>
+          <a:fillRef idx="3">
+            <a:schemeClr val="accent1"/>
+          </a:fillRef>
+          <a:effectRef idx="2">
+            <a:schemeClr val="accent1"/>
+          </a:effectRef>
+          <a:fontRef idx="minor">
+            <a:schemeClr val="lt1"/>
+          </a:fontRef>
+        </p:style>
+        <p:txBody>
+          <a:bodyPr rtlCol="0" anchor="ctr"/>
+          <a:lstStyle/>
+          <a:p>
+            <a:pPr algn="ctr"/>
+          </a:p>
+        </p:txBody>
+      </p:sp>
+      <p:sp>
+        <p:nvSpPr>
+          <p:cNvPr id="7" name="TextBox 6"/>
+          <p:cNvSpPr txBox="1"/>
+          <p:nvPr/>
+        </p:nvSpPr>
+        <p:spPr>
+          <a:xfrm>
+            <a:off x="914400" y="1371600"/>
+            <a:ext cx="4937760" cy="4572000"/>
+          </a:xfrm>
+          <a:prstGeom prst="rect">
+            <a:avLst/>
+          </a:prstGeom>
+          <a:noFill/>
+        </p:spPr>
+        <p:txBody>
+          <a:bodyPr wrap="square">
+            <a:spAutoFit/>
+          </a:bodyPr>
+          <a:lstStyle/>
+          <a:p>
+            <a:pPr>
+              <a:spcAft>
+                <a:spcPts val="1000"/>
+              </a:spcAft>
+              <a:defRPr b="1" sz="1450">
+                <a:solidFill>
+                  <a:srgbClr val="D97706"/>
+                </a:solidFill>
+              </a:defRPr>
+            </a:pPr>
+            <a:r>
+              <a:t>📚 KTU High-Yield Questions (K3 Apply)</a:t>
+            </a:r>
+          </a:p>
+          <a:p>
+            <a:pPr>
+              <a:spcAft>
+                <a:spcPts val="700"/>
+              </a:spcAft>
+              <a:defRPr sz="1200">
+                <a:solidFill>
+                  <a:srgbClr val="0F172A"/>
+                </a:solidFill>
+              </a:defRPr>
+            </a:pPr>
+            <a:r>
+              <a:t>Q: Draw and explain the step-by-step resolution process for `www.vjcet.ac.in` comparing Iterative and Recursive queries. (8 Marks)</a:t>
+            </a:r>
+          </a:p>
+          <a:p>
+            <a:pPr>
+              <a:spcAft>
+                <a:spcPts val="700"/>
+              </a:spcAft>
+              <a:defRPr sz="1200">
+                <a:solidFill>
+                  <a:srgbClr val="0F172A"/>
+                </a:solidFill>
+              </a:defRPr>
+            </a:pPr>
+            <a:r>
+              <a:t>Q: Explain the format and role of DNS Resource Records (A, AAAA, CNAME, NS, MX, PTR) with examples. (7 Marks)</a:t>
+            </a:r>
+          </a:p>
+          <a:p>
+            <a:pPr>
+              <a:spcAft>
+                <a:spcPts val="700"/>
+              </a:spcAft>
+              <a:defRPr sz="1200">
+                <a:solidFill>
+                  <a:srgbClr val="0F172A"/>
+                </a:solidFill>
+              </a:defRPr>
+            </a:pPr>
+            <a:r>
+              <a:t>Q: Why does DNS use UDP on port 53 for standard queries instead of TCP? When is TCP used in DNS? (5 Marks)</a:t>
+            </a:r>
+          </a:p>
+        </p:txBody>
+      </p:sp>
+      <p:sp>
+        <p:nvSpPr>
+          <p:cNvPr id="8" name="Rounded Rectangle 7"/>
+          <p:cNvSpPr/>
+          <p:nvPr/>
+        </p:nvSpPr>
+        <p:spPr>
+          <a:xfrm>
+            <a:off x="6309360" y="1234440"/>
+            <a:ext cx="5212080" cy="4892040"/>
+          </a:xfrm>
+          <a:prstGeom prst="roundRect">
+            <a:avLst/>
+          </a:prstGeom>
+          <a:solidFill>
+            <a:srgbClr val="EEF2FF"/>
+          </a:solidFill>
+          <a:ln w="19050">
+            <a:solidFill>
+              <a:srgbClr val="0E7490"/>
+            </a:solidFill>
+          </a:ln>
+        </p:spPr>
+        <p:style>
+          <a:lnRef idx="1">
+            <a:schemeClr val="accent1"/>
+          </a:lnRef>
+          <a:fillRef idx="3">
+            <a:schemeClr val="accent1"/>
+          </a:fillRef>
+          <a:effectRef idx="2">
+            <a:schemeClr val="accent1"/>
+          </a:effectRef>
+          <a:fontRef idx="minor">
+            <a:schemeClr val="lt1"/>
+          </a:fontRef>
+        </p:style>
+        <p:txBody>
+          <a:bodyPr rtlCol="0" anchor="ctr"/>
+          <a:lstStyle/>
+          <a:p>
+            <a:pPr algn="ctr"/>
+          </a:p>
+        </p:txBody>
+      </p:sp>
+      <p:sp>
+        <p:nvSpPr>
+          <p:cNvPr id="9" name="TextBox 8"/>
+          <p:cNvSpPr txBox="1"/>
+          <p:nvPr/>
+        </p:nvSpPr>
+        <p:spPr>
+          <a:xfrm>
+            <a:off x="6492240" y="1371600"/>
+            <a:ext cx="4846320" cy="4572000"/>
+          </a:xfrm>
+          <a:prstGeom prst="rect">
+            <a:avLst/>
+          </a:prstGeom>
+          <a:noFill/>
+        </p:spPr>
+        <p:txBody>
+          <a:bodyPr wrap="square">
+            <a:spAutoFit/>
+          </a:bodyPr>
+          <a:lstStyle/>
+          <a:p>
+            <a:pPr>
+              <a:spcAft>
+                <a:spcPts val="1000"/>
+              </a:spcAft>
+              <a:defRPr b="1" sz="1450">
+                <a:solidFill>
+                  <a:srgbClr val="0E7490"/>
+                </a:solidFill>
+              </a:defRPr>
+            </a:pPr>
+            <a:r>
+              <a:t>💡 Critical Conceptual Takeaways</a:t>
+            </a:r>
+          </a:p>
+          <a:p>
+            <a:pPr>
+              <a:spcAft>
+                <a:spcPts val="600"/>
+              </a:spcAft>
+              <a:defRPr sz="1200">
+                <a:solidFill>
+                  <a:srgbClr val="0F172A"/>
+                </a:solidFill>
+              </a:defRPr>
+            </a:pPr>
+            <a:r>
+              <a:t>✔ Standard DNS uses UDP port 53 for fast 1-round-trip resolution without 3-way handshake overhead.</a:t>
+            </a:r>
+          </a:p>
+          <a:p>
+            <a:pPr>
+              <a:spcAft>
+                <a:spcPts val="600"/>
+              </a:spcAft>
+              <a:defRPr sz="1200">
+                <a:solidFill>
+                  <a:srgbClr val="0F172A"/>
+                </a:solidFill>
+              </a:defRPr>
+            </a:pPr>
+            <a:r>
+              <a:t>✔ TCP port 53 is used for DNS Zone Transfers between primary/secondary servers and responses exceeding 512 bytes (EDNS0).</a:t>
+            </a:r>
+          </a:p>
+          <a:p>
+            <a:pPr>
+              <a:spcAft>
+                <a:spcPts val="600"/>
+              </a:spcAft>
+              <a:defRPr sz="1200">
+                <a:solidFill>
+                  <a:srgbClr val="0F172A"/>
+                </a:solidFill>
+              </a:defRPr>
+            </a:pPr>
+            <a:r>
+              <a:t>✔ DNS caching drastically improves web browsing latency across the globe.</a:t>
+            </a:r>
+          </a:p>
+        </p:txBody>
+      </p:sp>
+      <p:sp>
+        <p:nvSpPr>
+          <p:cNvPr id="10" name="TextBox 9"/>
+          <p:cNvSpPr txBox="1"/>
+          <p:nvPr/>
+        </p:nvSpPr>
+        <p:spPr>
+          <a:xfrm>
+            <a:off x="731520" y="6327648"/>
+            <a:ext cx="10789920" cy="320040"/>
+          </a:xfrm>
+          <a:prstGeom prst="rect">
+            <a:avLst/>
+          </a:prstGeom>
+          <a:noFill/>
+        </p:spPr>
+        <p:txBody>
+          <a:bodyPr wrap="none">
+            <a:spAutoFit/>
+          </a:bodyPr>
+          <a:lstStyle/>
+          <a:p>
+            <a:pPr>
+              <a:defRPr sz="950">
+                <a:solidFill>
+                  <a:srgbClr val="64748B"/>
+                </a:solidFill>
+              </a:defRPr>
+            </a:pPr>
+            <a:r>
+              <a:t>PCCST501 Computer Networks | KTU 2024 Scheme | Prof. Anju Markose | Assistant Professor, Dept. of CSE | VJCET</a:t>
+            </a:r>
+          </a:p>
+        </p:txBody>
+      </p:sp>
+      <p:sp>
+        <p:nvSpPr>
+          <p:cNvPr id="11" name="TextBox 10"/>
+          <p:cNvSpPr txBox="1"/>
+          <p:nvPr/>
+        </p:nvSpPr>
+        <p:spPr>
+          <a:xfrm>
+            <a:off x="6858000" y="6327648"/>
+            <a:ext cx="4572000" cy="320040"/>
+          </a:xfrm>
+          <a:prstGeom prst="rect">
+            <a:avLst/>
+          </a:prstGeom>
+          <a:noFill/>
+        </p:spPr>
+        <p:txBody>
+          <a:bodyPr wrap="none">
+            <a:spAutoFit/>
+          </a:bodyPr>
+          <a:lstStyle/>
+          <a:p>
+            <a:pPr algn="r">
+              <a:defRPr sz="950">
+                <a:solidFill>
+                  <a:srgbClr val="64748B"/>
+                </a:solidFill>
+              </a:defRPr>
+            </a:pPr>
+            <a:r>
+              <a:t>Dept. of CSE, VJCET</a:t>
             </a:r>
           </a:p>
         </p:txBody>
